--- a/Enterprise_ITSM_Platform_Presentation.pptx
+++ b/Enterprise_ITSM_Platform_Presentation.pptx
@@ -11,6 +11,7 @@
     <p:sldId id="259" r:id="rId10"/>
     <p:sldId id="260" r:id="rId11"/>
     <p:sldId id="261" r:id="rId12"/>
+    <p:sldId id="262" r:id="rId13"/>
   </p:sldIdLst>
   <p:sldSz cx="12191695" cy="6858000" type="screen4x3"/>
   <p:notesSz cx="6858000" cy="9144000"/>
@@ -3320,7 +3321,7 @@
               </a:defRPr>
             </a:pPr>
             <a:r>
-              <a:t>EXECUTIVE SERVICE MANAGEMENT DEMO</a:t>
+              <a:t>PLATFORM INFRASTRUCTURE &amp; LLM METRICS</a:t>
             </a:r>
           </a:p>
         </p:txBody>
@@ -3355,14 +3356,14 @@
               </a:defRPr>
             </a:pPr>
             <a:r>
-              <a:t>1. Live Dashboard &amp; Command Center Overview</a:t>
+              <a:t>2. System Architecture &amp; Token Calculation Engine</a:t>
             </a:r>
           </a:p>
         </p:txBody>
       </p:sp>
       <p:pic>
         <p:nvPicPr>
-          <p:cNvPr id="5" name="Picture 4" descr="dashboard_overview.png"/>
+          <p:cNvPr id="5" name="Picture 4" descr="architecture_diagram.png"/>
           <p:cNvPicPr>
             <a:picLocks noChangeAspect="1"/>
           </p:cNvPicPr>
@@ -3377,7 +3378,7 @@
         <p:spPr>
           <a:xfrm>
             <a:off x="731520" y="1280160"/>
-            <a:ext cx="7498079" cy="3617237"/>
+            <a:ext cx="6583680" cy="3674612"/>
           </a:xfrm>
           <a:prstGeom prst="rect">
             <a:avLst/>
@@ -3392,8 +3393,8 @@
         </p:nvSpPr>
         <p:spPr>
           <a:xfrm>
-            <a:off x="8412480" y="1280160"/>
-            <a:ext cx="3017520" cy="4937760"/>
+            <a:off x="7498079" y="1280160"/>
+            <a:ext cx="3931920" cy="4937760"/>
           </a:xfrm>
           <a:prstGeom prst="roundRect">
             <a:avLst/>
@@ -3433,72 +3434,116 @@
               </a:defRPr>
             </a:pPr>
             <a:r>
-              <a:t>Dashboard Highlights</a:t>
+              <a:t>Token Calculation Per Incident</a:t>
+            </a:r>
+          </a:p>
+          <a:p>
+            <a:pPr>
+              <a:defRPr sz="1050" b="1">
+                <a:solidFill>
+                  <a:srgbClr val="6366F1"/>
+                </a:solidFill>
+              </a:defRPr>
+            </a:pPr>
+            <a:r>
+              <a:t>🤖 NVIDIA Nemotron 3 550B (AI Ticket Router):</a:t>
+            </a:r>
+          </a:p>
+          <a:p>
+            <a:pPr>
+              <a:defRPr sz="1050">
+                <a:solidFill>
+                  <a:srgbClr val="CBD5E1"/>
+                </a:solidFill>
+              </a:defRPr>
+            </a:pPr>
+            <a:r>
+              <a:t>  • Input Prompt: ~850 tokens (System prompt, ITIL guidelines, CI, Priority, Activity notes)</a:t>
+            </a:r>
+          </a:p>
+          <a:p>
+            <a:pPr>
+              <a:defRPr sz="1050">
+                <a:solidFill>
+                  <a:srgbClr val="CBD5E1"/>
+                </a:solidFill>
+              </a:defRPr>
+            </a:pPr>
+            <a:r>
+              <a:t>  • Output Reasoning: ~350 tokens (Chain-of-thought, Target group, Work note)</a:t>
+            </a:r>
+          </a:p>
+          <a:p>
+            <a:pPr>
+              <a:defRPr sz="1050">
+                <a:solidFill>
+                  <a:srgbClr val="CBD5E1"/>
+                </a:solidFill>
+              </a:defRPr>
+            </a:pPr>
+            <a:r>
+              <a:t>  • Total / Incident: ~1,200 tokens (~1.2M tokens for 1,000 tickets)</a:t>
             </a:r>
           </a:p>
           <a:p>
             <a:br/>
             <a:pPr>
-              <a:defRPr sz="1100">
+              <a:defRPr sz="1050">
                 <a:solidFill>
                   <a:srgbClr val="CBD5E1"/>
                 </a:solidFill>
               </a:defRPr>
             </a:pPr>
             <a:r>
-              <a:t>• 100% Dynamic Synchronization with backend database file (`incidents.json`).</a:t>
-            </a:r>
-          </a:p>
-          <a:p>
-            <a:br/>
+              <a:t>📚 Meta Llama 3.3 70B (Knowledge Synthesizer):</a:t>
+            </a:r>
+          </a:p>
+          <a:p>
             <a:pPr>
-              <a:defRPr sz="1100">
+              <a:defRPr sz="1050">
                 <a:solidFill>
                   <a:srgbClr val="CBD5E1"/>
                 </a:solidFill>
               </a:defRPr>
             </a:pPr>
             <a:r>
-              <a:t>• Total Database Incidents metric tracks 1,000+ persistent records.</a:t>
-            </a:r>
-          </a:p>
-          <a:p>
-            <a:br/>
+              <a:t>  • Input Batch Prompt (10 tickets): ~4,500 tokens</a:t>
+            </a:r>
+          </a:p>
+          <a:p>
             <a:pPr>
-              <a:defRPr sz="1100">
+              <a:defRPr sz="1050">
                 <a:solidFill>
                   <a:srgbClr val="CBD5E1"/>
                 </a:solidFill>
               </a:defRPr>
             </a:pPr>
             <a:r>
-              <a:t>• Live Unassigned Queue countdown reflects real-time AI Router progress.</a:t>
-            </a:r>
-          </a:p>
-          <a:p>
-            <a:br/>
+              <a:t>  • Output SOP Article: ~1,500 tokens</a:t>
+            </a:r>
+          </a:p>
+          <a:p>
             <a:pPr>
-              <a:defRPr sz="1100">
+              <a:defRPr sz="1050">
                 <a:solidFill>
                   <a:srgbClr val="CBD5E1"/>
                 </a:solidFill>
               </a:defRPr>
             </a:pPr>
             <a:r>
-              <a:t>• Real-time Active Incident Stream table with direct clickable links.</a:t>
-            </a:r>
-          </a:p>
-          <a:p>
-            <a:br/>
+              <a:t>  • Total / Batch: ~6,000 tokens (~600 tokens / incident)</a:t>
+            </a:r>
+          </a:p>
+          <a:p>
             <a:pPr>
-              <a:defRPr sz="1100">
+              <a:defRPr sz="1050">
                 <a:solidFill>
                   <a:srgbClr val="CBD5E1"/>
                 </a:solidFill>
               </a:defRPr>
             </a:pPr>
             <a:r>
-              <a:t>• 98.4%+ SLA target compliance monitoring across P1 &amp; P2 tickets.</a:t>
+              <a:t>  • Total for 1,000 Incidents: ~600,000 tokens</a:t>
             </a:r>
           </a:p>
         </p:txBody>
@@ -3594,7 +3639,7 @@
               </a:defRPr>
             </a:pPr>
             <a:r>
-              <a:t>AUTONOMOUS ITIL TRIAGE ENGINE</a:t>
+              <a:t>EXECUTIVE SERVICE MANAGEMENT DEMO</a:t>
             </a:r>
           </a:p>
         </p:txBody>
@@ -3629,14 +3674,14 @@
               </a:defRPr>
             </a:pPr>
             <a:r>
-              <a:t>2. Agentic AI Ticket Router (NVIDIA Nemotron 3 550B LLM)</a:t>
+              <a:t>3. Live Dashboard &amp; Command Center Overview</a:t>
             </a:r>
           </a:p>
         </p:txBody>
       </p:sp>
       <p:pic>
         <p:nvPicPr>
-          <p:cNvPr id="5" name="Picture 4" descr="ai_router_terminal.png"/>
+          <p:cNvPr id="5" name="Picture 4" descr="dashboard_overview.png"/>
           <p:cNvPicPr>
             <a:picLocks noChangeAspect="1"/>
           </p:cNvPicPr>
@@ -3650,8 +3695,8 @@
         </p:blipFill>
         <p:spPr>
           <a:xfrm>
-            <a:off x="731520" y="1371600"/>
-            <a:ext cx="7498079" cy="834747"/>
+            <a:off x="731520" y="1280160"/>
+            <a:ext cx="7498079" cy="3617237"/>
           </a:xfrm>
           <a:prstGeom prst="rect">
             <a:avLst/>
@@ -3666,8 +3711,8 @@
         </p:nvSpPr>
         <p:spPr>
           <a:xfrm>
-            <a:off x="8412480" y="1371600"/>
-            <a:ext cx="3017520" cy="4846320"/>
+            <a:off x="8412480" y="1280160"/>
+            <a:ext cx="3017520" cy="4937760"/>
           </a:xfrm>
           <a:prstGeom prst="roundRect">
             <a:avLst/>
@@ -3702,12 +3747,12 @@
             <a:pPr algn="ctr">
               <a:defRPr sz="1600" b="1">
                 <a:solidFill>
-                  <a:srgbClr val="F59E0B"/>
-                </a:solidFill>
-              </a:defRPr>
-            </a:pPr>
-            <a:r>
-              <a:t>AI Router Features</a:t>
+                  <a:srgbClr val="10B981"/>
+                </a:solidFill>
+              </a:defRPr>
+            </a:pPr>
+            <a:r>
+              <a:t>Dashboard Highlights</a:t>
             </a:r>
           </a:p>
           <a:p>
@@ -3720,7 +3765,7 @@
               </a:defRPr>
             </a:pPr>
             <a:r>
-              <a:t>• Continuous Background Monitoring: Scans unassigned queue every 10 seconds.</a:t>
+              <a:t>• 100% Dynamic Synchronization with backend database file (`incidents.json`).</a:t>
             </a:r>
           </a:p>
           <a:p>
@@ -3733,7 +3778,7 @@
               </a:defRPr>
             </a:pPr>
             <a:r>
-              <a:t>• NVIDIA Nemotron 3 550B LLM performs multi-factor diagnostic reasoning.</a:t>
+              <a:t>• Total Database Incidents metric tracks 1,000+ persistent records.</a:t>
             </a:r>
           </a:p>
           <a:p>
@@ -3746,7 +3791,7 @@
               </a:defRPr>
             </a:pPr>
             <a:r>
-              <a:t>• Strict ITIL Group Routing (Unix, Network Ops, App Support, SecOps, DBA).</a:t>
+              <a:t>• Live Unassigned Queue countdown reflects real-time AI Router progress.</a:t>
             </a:r>
           </a:p>
           <a:p>
@@ -3759,7 +3804,7 @@
               </a:defRPr>
             </a:pPr>
             <a:r>
-              <a:t>• High-Availability Rule Engine Fallback guarantees 96%+ routing uptime.</a:t>
+              <a:t>• Real-time Active Incident Stream table with direct clickable links.</a:t>
             </a:r>
           </a:p>
           <a:p>
@@ -3772,7 +3817,7 @@
               </a:defRPr>
             </a:pPr>
             <a:r>
-              <a:t>• Automatic execution logs emitted directly in NestJS console.</a:t>
+              <a:t>• 98.4%+ SLA target compliance monitoring across P1 &amp; P2 tickets.</a:t>
             </a:r>
           </a:p>
         </p:txBody>
@@ -3868,7 +3913,7 @@
               </a:defRPr>
             </a:pPr>
             <a:r>
-              <a:t>ITIL PROCESS EXECUTION</a:t>
+              <a:t>AUTONOMOUS ITIL TRIAGE ENGINE</a:t>
             </a:r>
           </a:p>
         </p:txBody>
@@ -3903,14 +3948,14 @@
               </a:defRPr>
             </a:pPr>
             <a:r>
-              <a:t>3. Incident Management Console &amp; Triage Queue</a:t>
+              <a:t>4. Agentic AI Ticket Router (NVIDIA Nemotron 3 550B LLM)</a:t>
             </a:r>
           </a:p>
         </p:txBody>
       </p:sp>
       <p:pic>
         <p:nvPicPr>
-          <p:cNvPr id="5" name="Picture 4" descr="incident_list.png"/>
+          <p:cNvPr id="5" name="Picture 4" descr="ai_router_terminal.png"/>
           <p:cNvPicPr>
             <a:picLocks noChangeAspect="1"/>
           </p:cNvPicPr>
@@ -3924,8 +3969,8 @@
         </p:blipFill>
         <p:spPr>
           <a:xfrm>
-            <a:off x="731520" y="1280160"/>
-            <a:ext cx="7498079" cy="3544014"/>
+            <a:off x="731520" y="1371600"/>
+            <a:ext cx="7498079" cy="834747"/>
           </a:xfrm>
           <a:prstGeom prst="rect">
             <a:avLst/>
@@ -3940,8 +3985,8 @@
         </p:nvSpPr>
         <p:spPr>
           <a:xfrm>
-            <a:off x="8412480" y="1280160"/>
-            <a:ext cx="3017520" cy="4937760"/>
+            <a:off x="8412480" y="1371600"/>
+            <a:ext cx="3017520" cy="4846320"/>
           </a:xfrm>
           <a:prstGeom prst="roundRect">
             <a:avLst/>
@@ -3976,12 +4021,12 @@
             <a:pPr algn="ctr">
               <a:defRPr sz="1600" b="1">
                 <a:solidFill>
-                  <a:srgbClr val="6366F1"/>
-                </a:solidFill>
-              </a:defRPr>
-            </a:pPr>
-            <a:r>
-              <a:t>Console Capabilities</a:t>
+                  <a:srgbClr val="F59E0B"/>
+                </a:solidFill>
+              </a:defRPr>
+            </a:pPr>
+            <a:r>
+              <a:t>AI Router Features</a:t>
             </a:r>
           </a:p>
           <a:p>
@@ -3994,7 +4039,7 @@
               </a:defRPr>
             </a:pPr>
             <a:r>
-              <a:t>• 1,000+ Record Database view powered by single source of truth.</a:t>
+              <a:t>• Continuous Background Monitoring: Scans unassigned queue every 10 seconds.</a:t>
             </a:r>
           </a:p>
           <a:p>
@@ -4007,7 +4052,7 @@
               </a:defRPr>
             </a:pPr>
             <a:r>
-              <a:t>• Multi-field search filter by Ticket ID, Title, Group, or Assigned Tech.</a:t>
+              <a:t>• NVIDIA Nemotron 3 550B LLM performs multi-factor diagnostic reasoning.</a:t>
             </a:r>
           </a:p>
           <a:p>
@@ -4020,7 +4065,7 @@
               </a:defRPr>
             </a:pPr>
             <a:r>
-              <a:t>• Real-time counters for Unassigned Queue, Assigned &amp; Resolved, and P1s.</a:t>
+              <a:t>• Strict ITIL Group Routing (Unix, Network Ops, App Support, SecOps, DBA).</a:t>
             </a:r>
           </a:p>
           <a:p>
@@ -4033,7 +4078,7 @@
               </a:defRPr>
             </a:pPr>
             <a:r>
-              <a:t>• ITIL Impact x Urgency matrix automatically calculates P1 - P4 priorities.</a:t>
+              <a:t>• High-Availability Rule Engine Fallback guarantees 96%+ routing uptime.</a:t>
             </a:r>
           </a:p>
           <a:p>
@@ -4046,7 +4091,7 @@
               </a:defRPr>
             </a:pPr>
             <a:r>
-              <a:t>• Direct integration with NestJS REST API (`GET /api/v1/incidents`).</a:t>
+              <a:t>• Automatic execution logs emitted directly in NestJS console.</a:t>
             </a:r>
           </a:p>
         </p:txBody>
@@ -4142,7 +4187,7 @@
               </a:defRPr>
             </a:pPr>
             <a:r>
-              <a:t>DIAGNOSTIC WORKFLOW &amp; AUDIT TRAIL</a:t>
+              <a:t>ITIL PROCESS EXECUTION</a:t>
             </a:r>
           </a:p>
         </p:txBody>
@@ -4177,14 +4222,14 @@
               </a:defRPr>
             </a:pPr>
             <a:r>
-              <a:t>4. Incident Detail &amp; Agentic AI Work Notes Log</a:t>
+              <a:t>5. Incident Management Console &amp; Triage Queue</a:t>
             </a:r>
           </a:p>
         </p:txBody>
       </p:sp>
       <p:pic>
         <p:nvPicPr>
-          <p:cNvPr id="5" name="Picture 4" descr="incident_detail.png"/>
+          <p:cNvPr id="5" name="Picture 4" descr="incident_list.png"/>
           <p:cNvPicPr>
             <a:picLocks noChangeAspect="1"/>
           </p:cNvPicPr>
@@ -4199,7 +4244,7 @@
         <p:spPr>
           <a:xfrm>
             <a:off x="731520" y="1280160"/>
-            <a:ext cx="7498079" cy="3170574"/>
+            <a:ext cx="7498079" cy="3544014"/>
           </a:xfrm>
           <a:prstGeom prst="rect">
             <a:avLst/>
@@ -4250,12 +4295,12 @@
             <a:pPr algn="ctr">
               <a:defRPr sz="1600" b="1">
                 <a:solidFill>
-                  <a:srgbClr val="10B981"/>
-                </a:solidFill>
-              </a:defRPr>
-            </a:pPr>
-            <a:r>
-              <a:t>Activity Log Audit</a:t>
+                  <a:srgbClr val="6366F1"/>
+                </a:solidFill>
+              </a:defRPr>
+            </a:pPr>
+            <a:r>
+              <a:t>Console Capabilities</a:t>
             </a:r>
           </a:p>
           <a:p>
@@ -4268,7 +4313,7 @@
               </a:defRPr>
             </a:pPr>
             <a:r>
-              <a:t>• Agentic AI Router posts internal Department Work Notes automatically.</a:t>
+              <a:t>• 1,000+ Record Database view powered by single source of truth.</a:t>
             </a:r>
           </a:p>
           <a:p>
@@ -4281,7 +4326,7 @@
               </a:defRPr>
             </a:pPr>
             <a:r>
-              <a:t>• Includes reasoning text, target group, assigned lead, and confidence score.</a:t>
+              <a:t>• Multi-field search filter by Ticket ID, Title, Group, or Assigned Tech.</a:t>
             </a:r>
           </a:p>
           <a:p>
@@ -4294,7 +4339,7 @@
               </a:defRPr>
             </a:pPr>
             <a:r>
-              <a:t>• ITIL Close Codes (Kernel Patch, DB Vacuum, SSO Fix, BGP Reset).</a:t>
+              <a:t>• Real-time counters for Unassigned Queue, Assigned &amp; Resolved, and P1s.</a:t>
             </a:r>
           </a:p>
           <a:p>
@@ -4307,7 +4352,7 @@
               </a:defRPr>
             </a:pPr>
             <a:r>
-              <a:t>• SLA Target Metrics timer (Response SLA &amp; Resolution SLA).</a:t>
+              <a:t>• ITIL Impact x Urgency matrix automatically calculates P1 - P4 priorities.</a:t>
             </a:r>
           </a:p>
           <a:p>
@@ -4320,7 +4365,7 @@
               </a:defRPr>
             </a:pPr>
             <a:r>
-              <a:t>• Persistent activity timeline preserved in database file.</a:t>
+              <a:t>• Direct integration with NestJS REST API (`GET /api/v1/incidents`).</a:t>
             </a:r>
           </a:p>
         </p:txBody>
@@ -4416,7 +4461,7 @@
               </a:defRPr>
             </a:pPr>
             <a:r>
-              <a:t>AUTONOMOUS KNOWLEDGE SYNTHESIS</a:t>
+              <a:t>DIAGNOSTIC WORKFLOW &amp; AUDIT TRAIL</a:t>
             </a:r>
           </a:p>
         </p:txBody>
@@ -4451,7 +4496,281 @@
               </a:defRPr>
             </a:pPr>
             <a:r>
-              <a:t>5. Continuous Knowledge Base (Meta Llama 3.3 70B)</a:t>
+              <a:t>6. Incident Detail &amp; Agentic AI Work Notes Log</a:t>
+            </a:r>
+          </a:p>
+        </p:txBody>
+      </p:sp>
+      <p:pic>
+        <p:nvPicPr>
+          <p:cNvPr id="5" name="Picture 4" descr="incident_detail.png"/>
+          <p:cNvPicPr>
+            <a:picLocks noChangeAspect="1"/>
+          </p:cNvPicPr>
+          <p:nvPr/>
+        </p:nvPicPr>
+        <p:blipFill>
+          <a:blip r:embed="rId2"/>
+          <a:stretch>
+            <a:fillRect/>
+          </a:stretch>
+        </p:blipFill>
+        <p:spPr>
+          <a:xfrm>
+            <a:off x="731520" y="1280160"/>
+            <a:ext cx="7498079" cy="3170574"/>
+          </a:xfrm>
+          <a:prstGeom prst="rect">
+            <a:avLst/>
+          </a:prstGeom>
+        </p:spPr>
+      </p:pic>
+      <p:sp>
+        <p:nvSpPr>
+          <p:cNvPr id="6" name="Rounded Rectangle 5"/>
+          <p:cNvSpPr/>
+          <p:nvPr/>
+        </p:nvSpPr>
+        <p:spPr>
+          <a:xfrm>
+            <a:off x="8412480" y="1280160"/>
+            <a:ext cx="3017520" cy="4937760"/>
+          </a:xfrm>
+          <a:prstGeom prst="roundRect">
+            <a:avLst/>
+          </a:prstGeom>
+          <a:solidFill>
+            <a:srgbClr val="121826"/>
+          </a:solidFill>
+          <a:ln>
+            <a:solidFill>
+              <a:srgbClr val="6366F1"/>
+            </a:solidFill>
+          </a:ln>
+        </p:spPr>
+        <p:style>
+          <a:lnRef idx="1">
+            <a:schemeClr val="accent1"/>
+          </a:lnRef>
+          <a:fillRef idx="3">
+            <a:schemeClr val="accent1"/>
+          </a:fillRef>
+          <a:effectRef idx="2">
+            <a:schemeClr val="accent1"/>
+          </a:effectRef>
+          <a:fontRef idx="minor">
+            <a:schemeClr val="lt1"/>
+          </a:fontRef>
+        </p:style>
+        <p:txBody>
+          <a:bodyPr rtlCol="0" anchor="ctr" wrap="square"/>
+          <a:lstStyle/>
+          <a:p>
+            <a:pPr algn="ctr">
+              <a:defRPr sz="1600" b="1">
+                <a:solidFill>
+                  <a:srgbClr val="10B981"/>
+                </a:solidFill>
+              </a:defRPr>
+            </a:pPr>
+            <a:r>
+              <a:t>Activity Log Audit</a:t>
+            </a:r>
+          </a:p>
+          <a:p>
+            <a:br/>
+            <a:pPr>
+              <a:defRPr sz="1100">
+                <a:solidFill>
+                  <a:srgbClr val="CBD5E1"/>
+                </a:solidFill>
+              </a:defRPr>
+            </a:pPr>
+            <a:r>
+              <a:t>• Agentic AI Router posts internal Department Work Notes automatically.</a:t>
+            </a:r>
+          </a:p>
+          <a:p>
+            <a:br/>
+            <a:pPr>
+              <a:defRPr sz="1100">
+                <a:solidFill>
+                  <a:srgbClr val="CBD5E1"/>
+                </a:solidFill>
+              </a:defRPr>
+            </a:pPr>
+            <a:r>
+              <a:t>• Includes reasoning text, target group, assigned lead, and confidence score.</a:t>
+            </a:r>
+          </a:p>
+          <a:p>
+            <a:br/>
+            <a:pPr>
+              <a:defRPr sz="1100">
+                <a:solidFill>
+                  <a:srgbClr val="CBD5E1"/>
+                </a:solidFill>
+              </a:defRPr>
+            </a:pPr>
+            <a:r>
+              <a:t>• ITIL Close Codes (Kernel Patch, DB Vacuum, SSO Fix, BGP Reset).</a:t>
+            </a:r>
+          </a:p>
+          <a:p>
+            <a:br/>
+            <a:pPr>
+              <a:defRPr sz="1100">
+                <a:solidFill>
+                  <a:srgbClr val="CBD5E1"/>
+                </a:solidFill>
+              </a:defRPr>
+            </a:pPr>
+            <a:r>
+              <a:t>• SLA Target Metrics timer (Response SLA &amp; Resolution SLA).</a:t>
+            </a:r>
+          </a:p>
+          <a:p>
+            <a:br/>
+            <a:pPr>
+              <a:defRPr sz="1100">
+                <a:solidFill>
+                  <a:srgbClr val="CBD5E1"/>
+                </a:solidFill>
+              </a:defRPr>
+            </a:pPr>
+            <a:r>
+              <a:t>• Persistent activity timeline preserved in database file.</a:t>
+            </a:r>
+          </a:p>
+        </p:txBody>
+      </p:sp>
+    </p:spTree>
+  </p:cSld>
+  <p:clrMapOvr>
+    <a:masterClrMapping/>
+  </p:clrMapOvr>
+</p:sld>
+</file>
+
+<file path=ppt/slides/slide7.xml><?xml version="1.0" encoding="utf-8"?>
+<p:sld xmlns:a="http://schemas.openxmlformats.org/drawingml/2006/main" xmlns:p="http://schemas.openxmlformats.org/presentationml/2006/main" xmlns:r="http://schemas.openxmlformats.org/officeDocument/2006/relationships">
+  <p:cSld>
+    <p:spTree>
+      <p:nvGrpSpPr>
+        <p:cNvPr id="1" name=""/>
+        <p:cNvGrpSpPr/>
+        <p:nvPr/>
+      </p:nvGrpSpPr>
+      <p:grpSpPr/>
+      <p:sp>
+        <p:nvSpPr>
+          <p:cNvPr id="2" name="Rectangle 1"/>
+          <p:cNvSpPr/>
+          <p:nvPr/>
+        </p:nvSpPr>
+        <p:spPr>
+          <a:xfrm>
+            <a:off x="0" y="0"/>
+            <a:ext cx="12191695" cy="6858000"/>
+          </a:xfrm>
+          <a:prstGeom prst="rect">
+            <a:avLst/>
+          </a:prstGeom>
+          <a:solidFill>
+            <a:srgbClr val="0B0F19"/>
+          </a:solidFill>
+          <a:ln>
+            <a:noFill/>
+          </a:ln>
+        </p:spPr>
+        <p:style>
+          <a:lnRef idx="1">
+            <a:schemeClr val="accent1"/>
+          </a:lnRef>
+          <a:fillRef idx="3">
+            <a:schemeClr val="accent1"/>
+          </a:fillRef>
+          <a:effectRef idx="2">
+            <a:schemeClr val="accent1"/>
+          </a:effectRef>
+          <a:fontRef idx="minor">
+            <a:schemeClr val="lt1"/>
+          </a:fontRef>
+        </p:style>
+        <p:txBody>
+          <a:bodyPr rtlCol="0" anchor="ctr"/>
+          <a:lstStyle/>
+          <a:p>
+            <a:pPr algn="ctr"/>
+          </a:p>
+        </p:txBody>
+      </p:sp>
+      <p:sp>
+        <p:nvSpPr>
+          <p:cNvPr id="3" name="TextBox 2"/>
+          <p:cNvSpPr txBox="1"/>
+          <p:nvPr/>
+        </p:nvSpPr>
+        <p:spPr>
+          <a:xfrm>
+            <a:off x="731520" y="365760"/>
+            <a:ext cx="10728655" cy="274320"/>
+          </a:xfrm>
+          <a:prstGeom prst="rect">
+            <a:avLst/>
+          </a:prstGeom>
+          <a:noFill/>
+        </p:spPr>
+        <p:txBody>
+          <a:bodyPr wrap="square">
+            <a:spAutoFit/>
+          </a:bodyPr>
+          <a:lstStyle/>
+          <a:p>
+            <a:pPr>
+              <a:defRPr sz="1000" b="1">
+                <a:solidFill>
+                  <a:srgbClr val="6366F1"/>
+                </a:solidFill>
+              </a:defRPr>
+            </a:pPr>
+            <a:r>
+              <a:t>AUTONOMOUS KNOWLEDGE SYNTHESIS</a:t>
+            </a:r>
+          </a:p>
+        </p:txBody>
+      </p:sp>
+      <p:sp>
+        <p:nvSpPr>
+          <p:cNvPr id="4" name="TextBox 3"/>
+          <p:cNvSpPr txBox="1"/>
+          <p:nvPr/>
+        </p:nvSpPr>
+        <p:spPr>
+          <a:xfrm>
+            <a:off x="731520" y="594360"/>
+            <a:ext cx="10728655" cy="548640"/>
+          </a:xfrm>
+          <a:prstGeom prst="rect">
+            <a:avLst/>
+          </a:prstGeom>
+          <a:noFill/>
+        </p:spPr>
+        <p:txBody>
+          <a:bodyPr wrap="square">
+            <a:spAutoFit/>
+          </a:bodyPr>
+          <a:lstStyle/>
+          <a:p>
+            <a:pPr>
+              <a:defRPr sz="2200" b="1">
+                <a:solidFill>
+                  <a:srgbClr val="FFFFFF"/>
+                </a:solidFill>
+              </a:defRPr>
+            </a:pPr>
+            <a:r>
+              <a:t>7. Continuous Knowledge Base (Meta Llama 3.3 70B)</a:t>
             </a:r>
           </a:p>
         </p:txBody>

--- a/Enterprise_ITSM_Platform_Presentation.pptx
+++ b/Enterprise_ITSM_Platform_Presentation.pptx
@@ -3439,7 +3439,7 @@
           </a:p>
           <a:p>
             <a:pPr>
-              <a:defRPr sz="1050" b="1">
+              <a:defRPr sz="950" b="1">
                 <a:solidFill>
                   <a:srgbClr val="6366F1"/>
                 </a:solidFill>
@@ -3451,44 +3451,32 @@
           </a:p>
           <a:p>
             <a:pPr>
-              <a:defRPr sz="1050">
+              <a:defRPr sz="950">
                 <a:solidFill>
                   <a:srgbClr val="CBD5E1"/>
                 </a:solidFill>
               </a:defRPr>
             </a:pPr>
             <a:r>
-              <a:t>  • Input Prompt: ~850 tokens (System prompt, ITIL guidelines, CI, Priority, Activity notes)</a:t>
+              <a:t>  • Tokens: ~1,200 / incident (850 input + 350 output)</a:t>
             </a:r>
           </a:p>
           <a:p>
             <a:pPr>
-              <a:defRPr sz="1050">
+              <a:defRPr sz="950">
                 <a:solidFill>
                   <a:srgbClr val="CBD5E1"/>
                 </a:solidFill>
               </a:defRPr>
             </a:pPr>
             <a:r>
-              <a:t>  • Output Reasoning: ~350 tokens (Chain-of-thought, Target group, Work note)</a:t>
-            </a:r>
-          </a:p>
-          <a:p>
-            <a:pPr>
-              <a:defRPr sz="1050">
-                <a:solidFill>
-                  <a:srgbClr val="CBD5E1"/>
-                </a:solidFill>
-              </a:defRPr>
-            </a:pPr>
-            <a:r>
-              <a:t>  • Total / Incident: ~1,200 tokens (~1.2M tokens for 1,000 tickets)</a:t>
+              <a:t>  • Cost: $0.00190 / incident (~0.19 cents)</a:t>
             </a:r>
           </a:p>
           <a:p>
             <a:br/>
             <a:pPr>
-              <a:defRPr sz="1050">
+              <a:defRPr sz="950">
                 <a:solidFill>
                   <a:srgbClr val="CBD5E1"/>
                 </a:solidFill>
@@ -3500,50 +3488,100 @@
           </a:p>
           <a:p>
             <a:pPr>
-              <a:defRPr sz="1050">
+              <a:defRPr sz="950">
                 <a:solidFill>
                   <a:srgbClr val="CBD5E1"/>
                 </a:solidFill>
               </a:defRPr>
             </a:pPr>
             <a:r>
-              <a:t>  • Input Batch Prompt (10 tickets): ~4,500 tokens</a:t>
+              <a:t>  • Tokens: ~600 / incident (~6,000 per 10-ticket batch)</a:t>
             </a:r>
           </a:p>
           <a:p>
             <a:pPr>
-              <a:defRPr sz="1050">
+              <a:defRPr sz="950">
                 <a:solidFill>
                   <a:srgbClr val="CBD5E1"/>
                 </a:solidFill>
               </a:defRPr>
             </a:pPr>
             <a:r>
-              <a:t>  • Output SOP Article: ~1,500 tokens</a:t>
-            </a:r>
-          </a:p>
-          <a:p>
+              <a:t>  • Cost: $0.00018 / incident (~0.018 cents)</a:t>
+            </a:r>
+          </a:p>
+          <a:p>
+            <a:br/>
             <a:pPr>
-              <a:defRPr sz="1050">
+              <a:defRPr sz="950">
                 <a:solidFill>
                   <a:srgbClr val="CBD5E1"/>
                 </a:solidFill>
               </a:defRPr>
             </a:pPr>
             <a:r>
-              <a:t>  • Total / Batch: ~6,000 tokens (~600 tokens / incident)</a:t>
+              <a:t>💰 TOTAL PIPELINE COST / INCIDENT:</a:t>
             </a:r>
           </a:p>
           <a:p>
             <a:pPr>
-              <a:defRPr sz="1050">
+              <a:defRPr sz="950">
                 <a:solidFill>
                   <a:srgbClr val="CBD5E1"/>
                 </a:solidFill>
               </a:defRPr>
             </a:pPr>
             <a:r>
-              <a:t>  • Total for 1,000 Incidents: ~600,000 tokens</a:t>
+              <a:t>  • $0.00208 / incident (~0.2 cents per ticket)</a:t>
+            </a:r>
+          </a:p>
+          <a:p>
+            <a:pPr>
+              <a:defRPr sz="950">
+                <a:solidFill>
+                  <a:srgbClr val="CBD5E1"/>
+                </a:solidFill>
+              </a:defRPr>
+            </a:pPr>
+            <a:r>
+              <a:t>  • 1,000 Incidents Total Cost: $2.08</a:t>
+            </a:r>
+          </a:p>
+          <a:p>
+            <a:br/>
+            <a:pPr>
+              <a:defRPr sz="950">
+                <a:solidFill>
+                  <a:srgbClr val="CBD5E1"/>
+                </a:solidFill>
+              </a:defRPr>
+            </a:pPr>
+            <a:r>
+              <a:t>📈 ROI &amp; SAVINGS:</a:t>
+            </a:r>
+          </a:p>
+          <a:p>
+            <a:pPr>
+              <a:defRPr sz="950">
+                <a:solidFill>
+                  <a:srgbClr val="CBD5E1"/>
+                </a:solidFill>
+              </a:defRPr>
+            </a:pPr>
+            <a:r>
+              <a:t>  • Human Helpdesk Labor: $15.00 - $25.00 / incident</a:t>
+            </a:r>
+          </a:p>
+          <a:p>
+            <a:pPr>
+              <a:defRPr sz="950">
+                <a:solidFill>
+                  <a:srgbClr val="CBD5E1"/>
+                </a:solidFill>
+              </a:defRPr>
+            </a:pPr>
+            <a:r>
+              <a:t>  • Cost Reduction: 99.99% Savings! 🚀</a:t>
             </a:r>
           </a:p>
         </p:txBody>

--- a/Enterprise_ITSM_Platform_Presentation.pptx
+++ b/Enterprise_ITSM_Platform_Presentation.pptx
@@ -3734,7 +3734,7 @@
         <p:spPr>
           <a:xfrm>
             <a:off x="731520" y="1280160"/>
-            <a:ext cx="7498079" cy="3617237"/>
+            <a:ext cx="7498079" cy="4686299"/>
           </a:xfrm>
           <a:prstGeom prst="rect">
             <a:avLst/>
@@ -4282,7 +4282,7 @@
         <p:spPr>
           <a:xfrm>
             <a:off x="731520" y="1280160"/>
-            <a:ext cx="7498079" cy="3544014"/>
+            <a:ext cx="7498079" cy="4686299"/>
           </a:xfrm>
           <a:prstGeom prst="rect">
             <a:avLst/>

--- a/Enterprise_ITSM_Platform_Presentation.pptx
+++ b/Enterprise_ITSM_Platform_Presentation.pptx
@@ -12,6 +12,8 @@
     <p:sldId id="260" r:id="rId11"/>
     <p:sldId id="261" r:id="rId12"/>
     <p:sldId id="262" r:id="rId13"/>
+    <p:sldId id="263" r:id="rId14"/>
+    <p:sldId id="264" r:id="rId15"/>
   </p:sldIdLst>
   <p:sldSz cx="12191695" cy="6858000" type="screen4x3"/>
   <p:notesSz cx="6858000" cy="9144000"/>
@@ -4952,6 +4954,554 @@
             </a:pPr>
             <a:r>
               <a:t>• Live progress bar tracks 100% completion across 1,000 tickets.</a:t>
+            </a:r>
+          </a:p>
+        </p:txBody>
+      </p:sp>
+    </p:spTree>
+  </p:cSld>
+  <p:clrMapOvr>
+    <a:masterClrMapping/>
+  </p:clrMapOvr>
+</p:sld>
+</file>
+
+<file path=ppt/slides/slide8.xml><?xml version="1.0" encoding="utf-8"?>
+<p:sld xmlns:a="http://schemas.openxmlformats.org/drawingml/2006/main" xmlns:p="http://schemas.openxmlformats.org/presentationml/2006/main" xmlns:r="http://schemas.openxmlformats.org/officeDocument/2006/relationships">
+  <p:cSld>
+    <p:spTree>
+      <p:nvGrpSpPr>
+        <p:cNvPr id="1" name=""/>
+        <p:cNvGrpSpPr/>
+        <p:nvPr/>
+      </p:nvGrpSpPr>
+      <p:grpSpPr/>
+      <p:sp>
+        <p:nvSpPr>
+          <p:cNvPr id="2" name="Rectangle 1"/>
+          <p:cNvSpPr/>
+          <p:nvPr/>
+        </p:nvSpPr>
+        <p:spPr>
+          <a:xfrm>
+            <a:off x="0" y="0"/>
+            <a:ext cx="12191695" cy="6858000"/>
+          </a:xfrm>
+          <a:prstGeom prst="rect">
+            <a:avLst/>
+          </a:prstGeom>
+          <a:solidFill>
+            <a:srgbClr val="0B0F19"/>
+          </a:solidFill>
+          <a:ln>
+            <a:noFill/>
+          </a:ln>
+        </p:spPr>
+        <p:style>
+          <a:lnRef idx="1">
+            <a:schemeClr val="accent1"/>
+          </a:lnRef>
+          <a:fillRef idx="3">
+            <a:schemeClr val="accent1"/>
+          </a:fillRef>
+          <a:effectRef idx="2">
+            <a:schemeClr val="accent1"/>
+          </a:effectRef>
+          <a:fontRef idx="minor">
+            <a:schemeClr val="lt1"/>
+          </a:fontRef>
+        </p:style>
+        <p:txBody>
+          <a:bodyPr rtlCol="0" anchor="ctr"/>
+          <a:lstStyle/>
+          <a:p>
+            <a:pPr algn="ctr"/>
+          </a:p>
+        </p:txBody>
+      </p:sp>
+      <p:sp>
+        <p:nvSpPr>
+          <p:cNvPr id="3" name="TextBox 2"/>
+          <p:cNvSpPr txBox="1"/>
+          <p:nvPr/>
+        </p:nvSpPr>
+        <p:spPr>
+          <a:xfrm>
+            <a:off x="731520" y="365760"/>
+            <a:ext cx="10728655" cy="274320"/>
+          </a:xfrm>
+          <a:prstGeom prst="rect">
+            <a:avLst/>
+          </a:prstGeom>
+          <a:noFill/>
+        </p:spPr>
+        <p:txBody>
+          <a:bodyPr wrap="square">
+            <a:spAutoFit/>
+          </a:bodyPr>
+          <a:lstStyle/>
+          <a:p>
+            <a:pPr>
+              <a:defRPr sz="1000" b="1">
+                <a:solidFill>
+                  <a:srgbClr val="6366F1"/>
+                </a:solidFill>
+              </a:defRPr>
+            </a:pPr>
+            <a:r>
+              <a:t>ENTERPRISE INFRASTRUCTURE MAPPING</a:t>
+            </a:r>
+          </a:p>
+        </p:txBody>
+      </p:sp>
+      <p:sp>
+        <p:nvSpPr>
+          <p:cNvPr id="4" name="TextBox 3"/>
+          <p:cNvSpPr txBox="1"/>
+          <p:nvPr/>
+        </p:nvSpPr>
+        <p:spPr>
+          <a:xfrm>
+            <a:off x="731520" y="594360"/>
+            <a:ext cx="10728655" cy="548640"/>
+          </a:xfrm>
+          <a:prstGeom prst="rect">
+            <a:avLst/>
+          </a:prstGeom>
+          <a:noFill/>
+        </p:spPr>
+        <p:txBody>
+          <a:bodyPr wrap="square">
+            <a:spAutoFit/>
+          </a:bodyPr>
+          <a:lstStyle/>
+          <a:p>
+            <a:pPr>
+              <a:defRPr sz="2200" b="1">
+                <a:solidFill>
+                  <a:srgbClr val="FFFFFF"/>
+                </a:solidFill>
+              </a:defRPr>
+            </a:pPr>
+            <a:r>
+              <a:t>8. Interactive CMDB Topology Graph &amp; Blast Radius Map</a:t>
+            </a:r>
+          </a:p>
+        </p:txBody>
+      </p:sp>
+      <p:pic>
+        <p:nvPicPr>
+          <p:cNvPr id="5" name="Picture 4" descr="cmdb_topology_graph.png"/>
+          <p:cNvPicPr>
+            <a:picLocks noChangeAspect="1"/>
+          </p:cNvPicPr>
+          <p:nvPr/>
+        </p:nvPicPr>
+        <p:blipFill>
+          <a:blip r:embed="rId2"/>
+          <a:stretch>
+            <a:fillRect/>
+          </a:stretch>
+        </p:blipFill>
+        <p:spPr>
+          <a:xfrm>
+            <a:off x="731520" y="1280160"/>
+            <a:ext cx="7498079" cy="4686299"/>
+          </a:xfrm>
+          <a:prstGeom prst="rect">
+            <a:avLst/>
+          </a:prstGeom>
+        </p:spPr>
+      </p:pic>
+      <p:sp>
+        <p:nvSpPr>
+          <p:cNvPr id="6" name="Rounded Rectangle 5"/>
+          <p:cNvSpPr/>
+          <p:nvPr/>
+        </p:nvSpPr>
+        <p:spPr>
+          <a:xfrm>
+            <a:off x="8412480" y="1280160"/>
+            <a:ext cx="3017520" cy="4937760"/>
+          </a:xfrm>
+          <a:prstGeom prst="roundRect">
+            <a:avLst/>
+          </a:prstGeom>
+          <a:solidFill>
+            <a:srgbClr val="121826"/>
+          </a:solidFill>
+          <a:ln>
+            <a:solidFill>
+              <a:srgbClr val="6366F1"/>
+            </a:solidFill>
+          </a:ln>
+        </p:spPr>
+        <p:style>
+          <a:lnRef idx="1">
+            <a:schemeClr val="accent1"/>
+          </a:lnRef>
+          <a:fillRef idx="3">
+            <a:schemeClr val="accent1"/>
+          </a:fillRef>
+          <a:effectRef idx="2">
+            <a:schemeClr val="accent1"/>
+          </a:effectRef>
+          <a:fontRef idx="minor">
+            <a:schemeClr val="lt1"/>
+          </a:fontRef>
+        </p:style>
+        <p:txBody>
+          <a:bodyPr rtlCol="0" anchor="ctr" wrap="square"/>
+          <a:lstStyle/>
+          <a:p>
+            <a:pPr algn="ctr">
+              <a:defRPr sz="1600" b="1">
+                <a:solidFill>
+                  <a:srgbClr val="10B981"/>
+                </a:solidFill>
+              </a:defRPr>
+            </a:pPr>
+            <a:r>
+              <a:t>Topology Map Features</a:t>
+            </a:r>
+          </a:p>
+          <a:p>
+            <a:br/>
+            <a:pPr>
+              <a:defRPr sz="1100">
+                <a:solidFill>
+                  <a:srgbClr val="CBD5E1"/>
+                </a:solidFill>
+              </a:defRPr>
+            </a:pPr>
+            <a:r>
+              <a:t>• Interactive 2D Vector Node Network Canvas connecting all active CIs.</a:t>
+            </a:r>
+          </a:p>
+          <a:p>
+            <a:br/>
+            <a:pPr>
+              <a:defRPr sz="1100">
+                <a:solidFill>
+                  <a:srgbClr val="CBD5E1"/>
+                </a:solidFill>
+              </a:defRPr>
+            </a:pPr>
+            <a:r>
+              <a:t>• Upstream &amp; Downstream dependency streams (Hosted On, Depends On).</a:t>
+            </a:r>
+          </a:p>
+          <a:p>
+            <a:br/>
+            <a:pPr>
+              <a:defRPr sz="1100">
+                <a:solidFill>
+                  <a:srgbClr val="CBD5E1"/>
+                </a:solidFill>
+              </a:defRPr>
+            </a:pPr>
+            <a:r>
+              <a:t>• Outage Blast-Radius Visualizer: Node selection highlights impacted downstream CIs.</a:t>
+            </a:r>
+          </a:p>
+          <a:p>
+            <a:br/>
+            <a:pPr>
+              <a:defRPr sz="1100">
+                <a:solidFill>
+                  <a:srgbClr val="CBD5E1"/>
+                </a:solidFill>
+              </a:defRPr>
+            </a:pPr>
+            <a:r>
+              <a:t>• Real-time CI status indicators (Operational, Degraded, Maintenance).</a:t>
+            </a:r>
+          </a:p>
+          <a:p>
+            <a:br/>
+            <a:pPr>
+              <a:defRPr sz="1100">
+                <a:solidFill>
+                  <a:srgbClr val="CBD5E1"/>
+                </a:solidFill>
+              </a:defRPr>
+            </a:pPr>
+            <a:r>
+              <a:t>• Toggle between Interactive Topology Graph and Directory Table view.</a:t>
+            </a:r>
+          </a:p>
+        </p:txBody>
+      </p:sp>
+    </p:spTree>
+  </p:cSld>
+  <p:clrMapOvr>
+    <a:masterClrMapping/>
+  </p:clrMapOvr>
+</p:sld>
+</file>
+
+<file path=ppt/slides/slide9.xml><?xml version="1.0" encoding="utf-8"?>
+<p:sld xmlns:a="http://schemas.openxmlformats.org/drawingml/2006/main" xmlns:p="http://schemas.openxmlformats.org/presentationml/2006/main" xmlns:r="http://schemas.openxmlformats.org/officeDocument/2006/relationships">
+  <p:cSld>
+    <p:spTree>
+      <p:nvGrpSpPr>
+        <p:cNvPr id="1" name=""/>
+        <p:cNvGrpSpPr/>
+        <p:nvPr/>
+      </p:nvGrpSpPr>
+      <p:grpSpPr/>
+      <p:sp>
+        <p:nvSpPr>
+          <p:cNvPr id="2" name="Rectangle 1"/>
+          <p:cNvSpPr/>
+          <p:nvPr/>
+        </p:nvSpPr>
+        <p:spPr>
+          <a:xfrm>
+            <a:off x="0" y="0"/>
+            <a:ext cx="12191695" cy="6858000"/>
+          </a:xfrm>
+          <a:prstGeom prst="rect">
+            <a:avLst/>
+          </a:prstGeom>
+          <a:solidFill>
+            <a:srgbClr val="0B0F19"/>
+          </a:solidFill>
+          <a:ln>
+            <a:noFill/>
+          </a:ln>
+        </p:spPr>
+        <p:style>
+          <a:lnRef idx="1">
+            <a:schemeClr val="accent1"/>
+          </a:lnRef>
+          <a:fillRef idx="3">
+            <a:schemeClr val="accent1"/>
+          </a:fillRef>
+          <a:effectRef idx="2">
+            <a:schemeClr val="accent1"/>
+          </a:effectRef>
+          <a:fontRef idx="minor">
+            <a:schemeClr val="lt1"/>
+          </a:fontRef>
+        </p:style>
+        <p:txBody>
+          <a:bodyPr rtlCol="0" anchor="ctr"/>
+          <a:lstStyle/>
+          <a:p>
+            <a:pPr algn="ctr"/>
+          </a:p>
+        </p:txBody>
+      </p:sp>
+      <p:sp>
+        <p:nvSpPr>
+          <p:cNvPr id="3" name="TextBox 2"/>
+          <p:cNvSpPr txBox="1"/>
+          <p:nvPr/>
+        </p:nvSpPr>
+        <p:spPr>
+          <a:xfrm>
+            <a:off x="731520" y="365760"/>
+            <a:ext cx="10728655" cy="274320"/>
+          </a:xfrm>
+          <a:prstGeom prst="rect">
+            <a:avLst/>
+          </a:prstGeom>
+          <a:noFill/>
+        </p:spPr>
+        <p:txBody>
+          <a:bodyPr wrap="square">
+            <a:spAutoFit/>
+          </a:bodyPr>
+          <a:lstStyle/>
+          <a:p>
+            <a:pPr>
+              <a:defRPr sz="1000" b="1">
+                <a:solidFill>
+                  <a:srgbClr val="6366F1"/>
+                </a:solidFill>
+              </a:defRPr>
+            </a:pPr>
+            <a:r>
+              <a:t>ZERO-HUMAN INCIDENT RESOLUTION</a:t>
+            </a:r>
+          </a:p>
+        </p:txBody>
+      </p:sp>
+      <p:sp>
+        <p:nvSpPr>
+          <p:cNvPr id="4" name="TextBox 3"/>
+          <p:cNvSpPr txBox="1"/>
+          <p:nvPr/>
+        </p:nvSpPr>
+        <p:spPr>
+          <a:xfrm>
+            <a:off x="731520" y="594360"/>
+            <a:ext cx="10728655" cy="548640"/>
+          </a:xfrm>
+          <a:prstGeom prst="rect">
+            <a:avLst/>
+          </a:prstGeom>
+          <a:noFill/>
+        </p:spPr>
+        <p:txBody>
+          <a:bodyPr wrap="square">
+            <a:spAutoFit/>
+          </a:bodyPr>
+          <a:lstStyle/>
+          <a:p>
+            <a:pPr>
+              <a:defRPr sz="2200" b="1">
+                <a:solidFill>
+                  <a:srgbClr val="FFFFFF"/>
+                </a:solidFill>
+              </a:defRPr>
+            </a:pPr>
+            <a:r>
+              <a:t>9. Autonomous AI Self-Healing Auto-Remediation Bot</a:t>
+            </a:r>
+          </a:p>
+        </p:txBody>
+      </p:sp>
+      <p:pic>
+        <p:nvPicPr>
+          <p:cNvPr id="5" name="Picture 4" descr="ai_auto_remediation.png"/>
+          <p:cNvPicPr>
+            <a:picLocks noChangeAspect="1"/>
+          </p:cNvPicPr>
+          <p:nvPr/>
+        </p:nvPicPr>
+        <p:blipFill>
+          <a:blip r:embed="rId2"/>
+          <a:stretch>
+            <a:fillRect/>
+          </a:stretch>
+        </p:blipFill>
+        <p:spPr>
+          <a:xfrm>
+            <a:off x="731520" y="1280160"/>
+            <a:ext cx="7498079" cy="4686299"/>
+          </a:xfrm>
+          <a:prstGeom prst="rect">
+            <a:avLst/>
+          </a:prstGeom>
+        </p:spPr>
+      </p:pic>
+      <p:sp>
+        <p:nvSpPr>
+          <p:cNvPr id="6" name="Rounded Rectangle 5"/>
+          <p:cNvSpPr/>
+          <p:nvPr/>
+        </p:nvSpPr>
+        <p:spPr>
+          <a:xfrm>
+            <a:off x="8412480" y="1280160"/>
+            <a:ext cx="3017520" cy="4937760"/>
+          </a:xfrm>
+          <a:prstGeom prst="roundRect">
+            <a:avLst/>
+          </a:prstGeom>
+          <a:solidFill>
+            <a:srgbClr val="121826"/>
+          </a:solidFill>
+          <a:ln>
+            <a:solidFill>
+              <a:srgbClr val="6366F1"/>
+            </a:solidFill>
+          </a:ln>
+        </p:spPr>
+        <p:style>
+          <a:lnRef idx="1">
+            <a:schemeClr val="accent1"/>
+          </a:lnRef>
+          <a:fillRef idx="3">
+            <a:schemeClr val="accent1"/>
+          </a:fillRef>
+          <a:effectRef idx="2">
+            <a:schemeClr val="accent1"/>
+          </a:effectRef>
+          <a:fontRef idx="minor">
+            <a:schemeClr val="lt1"/>
+          </a:fontRef>
+        </p:style>
+        <p:txBody>
+          <a:bodyPr rtlCol="0" anchor="ctr" wrap="square"/>
+          <a:lstStyle/>
+          <a:p>
+            <a:pPr algn="ctr">
+              <a:defRPr sz="1600" b="1">
+                <a:solidFill>
+                  <a:srgbClr val="F59E0B"/>
+                </a:solidFill>
+              </a:defRPr>
+            </a:pPr>
+            <a:r>
+              <a:t>Self-Healing Playbooks</a:t>
+            </a:r>
+          </a:p>
+          <a:p>
+            <a:br/>
+            <a:pPr>
+              <a:defRPr sz="1100">
+                <a:solidFill>
+                  <a:srgbClr val="CBD5E1"/>
+                </a:solidFill>
+              </a:defRPr>
+            </a:pPr>
+            <a:r>
+              <a:t>• Automated root cause playbook execution (BGP Reset, K8s Scale, Redis Flush).</a:t>
+            </a:r>
+          </a:p>
+          <a:p>
+            <a:br/>
+            <a:pPr>
+              <a:defRPr sz="1100">
+                <a:solidFill>
+                  <a:srgbClr val="CBD5E1"/>
+                </a:solidFill>
+              </a:defRPr>
+            </a:pPr>
+            <a:r>
+              <a:t>• Live Step-by-step Terminal Console execution stream on ticket detail UI.</a:t>
+            </a:r>
+          </a:p>
+          <a:p>
+            <a:br/>
+            <a:pPr>
+              <a:defRPr sz="1100">
+                <a:solidFill>
+                  <a:srgbClr val="CBD5E1"/>
+                </a:solidFill>
+              </a:defRPr>
+            </a:pPr>
+            <a:r>
+              <a:t>• Automatically updates state to RESOLVED and logs close codes.</a:t>
+            </a:r>
+          </a:p>
+          <a:p>
+            <a:br/>
+            <a:pPr>
+              <a:defRPr sz="1100">
+                <a:solidFill>
+                  <a:srgbClr val="CBD5E1"/>
+                </a:solidFill>
+              </a:defRPr>
+            </a:pPr>
+            <a:r>
+              <a:t>• Reduces Mean Time to Resolution (MTTR) from minutes to &lt; 3 seconds.</a:t>
+            </a:r>
+          </a:p>
+          <a:p>
+            <a:br/>
+            <a:pPr>
+              <a:defRPr sz="1100">
+                <a:solidFill>
+                  <a:srgbClr val="CBD5E1"/>
+                </a:solidFill>
+              </a:defRPr>
+            </a:pPr>
+            <a:r>
+              <a:t>• Step-by-step audit activities written to persistent database file.</a:t>
             </a:r>
           </a:p>
         </p:txBody>
